--- a/collateral/cfs-slides-template.pptx
+++ b/collateral/cfs-slides-template.pptx
@@ -12172,7 +12172,7 @@
                 <a:ea typeface="Big Shoulders Display" pitchFamily="34" charset="-122"/>
                 <a:cs typeface="Big Shoulders Display" pitchFamily="34" charset="-120"/>
               </a:rPr>
-              <a:t>2028</a:t>
+              <a:t>2027</a:t>
             </a:r>
             <a:endParaRPr lang="en-US" sz="3200" dirty="0"/>
           </a:p>
